--- a/MLOps/2_core_pipeline/experiment_using_MLFlow/mlflow1/mlflow.pptx
+++ b/MLOps/2_core_pipeline/experiment_using_MLFlow/mlflow1/mlflow.pptx
@@ -232,7 +232,7 @@
           <a:p>
             <a:fld id="{7BAEECA8-D063-486F-AE31-5020270C1449}" type="datetimeFigureOut">
               <a:rPr lang="en-US" smtClean="0"/>
-              <a:t>3/30/2026</a:t>
+              <a:t>10/24/2026</a:t>
             </a:fld>
             <a:endParaRPr lang="en-US"/>
           </a:p>
@@ -409,7 +409,7 @@
           <a:p>
             <a:fld id="{CB233BD1-3BA8-448D-9D08-7846095EA517}" type="datetimeFigureOut">
               <a:rPr lang="en-US" smtClean="0"/>
-              <a:t>3/30/2026</a:t>
+              <a:t>10/24/2026</a:t>
             </a:fld>
             <a:endParaRPr lang="en-US"/>
           </a:p>
@@ -823,7 +823,7 @@
           <a:p>
             <a:fld id="{6383FAE1-13DE-4511-8C1B-C8AFB720664C}" type="datetimeFigureOut">
               <a:rPr lang="en-US" smtClean="0"/>
-              <a:t>3/30/2026</a:t>
+              <a:t>10/24/2026</a:t>
             </a:fld>
             <a:endParaRPr lang="en-US"/>
           </a:p>
@@ -1021,7 +1021,7 @@
           <a:p>
             <a:fld id="{6383FAE1-13DE-4511-8C1B-C8AFB720664C}" type="datetimeFigureOut">
               <a:rPr lang="en-US" smtClean="0"/>
-              <a:t>3/30/2026</a:t>
+              <a:t>10/24/2026</a:t>
             </a:fld>
             <a:endParaRPr lang="en-US"/>
           </a:p>
@@ -1229,7 +1229,7 @@
           <a:p>
             <a:fld id="{6383FAE1-13DE-4511-8C1B-C8AFB720664C}" type="datetimeFigureOut">
               <a:rPr lang="en-US" smtClean="0"/>
-              <a:t>3/30/2026</a:t>
+              <a:t>10/24/2026</a:t>
             </a:fld>
             <a:endParaRPr lang="en-US"/>
           </a:p>
@@ -1427,7 +1427,7 @@
           <a:p>
             <a:fld id="{6383FAE1-13DE-4511-8C1B-C8AFB720664C}" type="datetimeFigureOut">
               <a:rPr lang="en-US" smtClean="0"/>
-              <a:t>3/30/2026</a:t>
+              <a:t>10/24/2026</a:t>
             </a:fld>
             <a:endParaRPr lang="en-US"/>
           </a:p>
@@ -1702,7 +1702,7 @@
           <a:p>
             <a:fld id="{6383FAE1-13DE-4511-8C1B-C8AFB720664C}" type="datetimeFigureOut">
               <a:rPr lang="en-US" smtClean="0"/>
-              <a:t>3/30/2026</a:t>
+              <a:t>10/24/2026</a:t>
             </a:fld>
             <a:endParaRPr lang="en-US"/>
           </a:p>
@@ -1967,7 +1967,7 @@
           <a:p>
             <a:fld id="{6383FAE1-13DE-4511-8C1B-C8AFB720664C}" type="datetimeFigureOut">
               <a:rPr lang="en-US" smtClean="0"/>
-              <a:t>3/30/2026</a:t>
+              <a:t>10/24/2026</a:t>
             </a:fld>
             <a:endParaRPr lang="en-US"/>
           </a:p>
@@ -2379,7 +2379,7 @@
           <a:p>
             <a:fld id="{6383FAE1-13DE-4511-8C1B-C8AFB720664C}" type="datetimeFigureOut">
               <a:rPr lang="en-US" smtClean="0"/>
-              <a:t>3/30/2026</a:t>
+              <a:t>10/24/2026</a:t>
             </a:fld>
             <a:endParaRPr lang="en-US"/>
           </a:p>
@@ -2520,7 +2520,7 @@
           <a:p>
             <a:fld id="{6383FAE1-13DE-4511-8C1B-C8AFB720664C}" type="datetimeFigureOut">
               <a:rPr lang="en-US" smtClean="0"/>
-              <a:t>3/30/2026</a:t>
+              <a:t>10/24/2026</a:t>
             </a:fld>
             <a:endParaRPr lang="en-US"/>
           </a:p>
@@ -2633,7 +2633,7 @@
           <a:p>
             <a:fld id="{6383FAE1-13DE-4511-8C1B-C8AFB720664C}" type="datetimeFigureOut">
               <a:rPr lang="en-US" smtClean="0"/>
-              <a:t>3/30/2026</a:t>
+              <a:t>10/24/2026</a:t>
             </a:fld>
             <a:endParaRPr lang="en-US"/>
           </a:p>
@@ -2944,7 +2944,7 @@
           <a:p>
             <a:fld id="{6383FAE1-13DE-4511-8C1B-C8AFB720664C}" type="datetimeFigureOut">
               <a:rPr lang="en-US" smtClean="0"/>
-              <a:t>3/30/2026</a:t>
+              <a:t>10/24/2026</a:t>
             </a:fld>
             <a:endParaRPr lang="en-US"/>
           </a:p>
@@ -3235,7 +3235,7 @@
           <a:p>
             <a:fld id="{6383FAE1-13DE-4511-8C1B-C8AFB720664C}" type="datetimeFigureOut">
               <a:rPr lang="en-US" smtClean="0"/>
-              <a:t>3/30/2026</a:t>
+              <a:t>10/24/2026</a:t>
             </a:fld>
             <a:endParaRPr lang="en-US"/>
           </a:p>
@@ -3479,7 +3479,7 @@
           <a:p>
             <a:fld id="{6383FAE1-13DE-4511-8C1B-C8AFB720664C}" type="datetimeFigureOut">
               <a:rPr lang="en-US" smtClean="0"/>
-              <a:t>3/30/2026</a:t>
+              <a:t>10/24/2026</a:t>
             </a:fld>
             <a:endParaRPr lang="en-US"/>
           </a:p>
@@ -8272,168 +8272,6 @@
           <a:chExt cx="0" cy="0"/>
         </a:xfrm>
       </p:grpSpPr>
-      <p:sp>
-        <p:nvSpPr>
-          <p:cNvPr id="2" name="Title 1">
-            <a:extLst>
-              <a:ext uri="{FF2B5EF4-FFF2-40B4-BE49-F238E27FC236}">
-                <a16:creationId xmlns:a16="http://schemas.microsoft.com/office/drawing/2014/main" id="{795E1B75-886E-0812-B2FD-DD250C225521}"/>
-              </a:ext>
-            </a:extLst>
-          </p:cNvPr>
-          <p:cNvSpPr>
-            <a:spLocks noGrp="1"/>
-          </p:cNvSpPr>
-          <p:nvPr>
-            <p:ph type="title"/>
-          </p:nvPr>
-        </p:nvSpPr>
-        <p:spPr>
-          <a:xfrm>
-            <a:off x="274320" y="136525"/>
-            <a:ext cx="11466576" cy="832739"/>
-          </a:xfrm>
-        </p:spPr>
-        <p:txBody>
-          <a:bodyPr>
-            <a:normAutofit/>
-          </a:bodyPr>
-          <a:lstStyle/>
-          <a:p>
-            <a:r>
-              <a:rPr lang="en-US" sz="3600" dirty="0"/>
-              <a:t>EXTRA</a:t>
-            </a:r>
-          </a:p>
-        </p:txBody>
-      </p:sp>
-      <p:sp>
-        <p:nvSpPr>
-          <p:cNvPr id="4" name="TextBox 3">
-            <a:extLst>
-              <a:ext uri="{FF2B5EF4-FFF2-40B4-BE49-F238E27FC236}">
-                <a16:creationId xmlns:a16="http://schemas.microsoft.com/office/drawing/2014/main" id="{902F8BE4-9CEA-0DAD-0357-E0A8215F169D}"/>
-              </a:ext>
-            </a:extLst>
-          </p:cNvPr>
-          <p:cNvSpPr txBox="1"/>
-          <p:nvPr/>
-        </p:nvSpPr>
-        <p:spPr>
-          <a:xfrm>
-            <a:off x="274320" y="933117"/>
-            <a:ext cx="11658600" cy="1477328"/>
-          </a:xfrm>
-          <a:prstGeom prst="rect">
-            <a:avLst/>
-          </a:prstGeom>
-          <a:noFill/>
-        </p:spPr>
-        <p:txBody>
-          <a:bodyPr wrap="square">
-            <a:spAutoFit/>
-          </a:bodyPr>
-          <a:lstStyle/>
-          <a:p>
-            <a:pPr marL="0" indent="0">
-              <a:buNone/>
-            </a:pPr>
-            <a:r>
-              <a:rPr lang="en-US" dirty="0" err="1">
-                <a:solidFill>
-                  <a:schemeClr val="accent6">
-                    <a:lumMod val="60000"/>
-                    <a:lumOff val="40000"/>
-                  </a:schemeClr>
-                </a:solidFill>
-              </a:rPr>
-              <a:t>Ffnbksdfd</a:t>
-            </a:r>
-            <a:endParaRPr lang="en-US" dirty="0">
-              <a:solidFill>
-                <a:schemeClr val="accent6">
-                  <a:lumMod val="60000"/>
-                  <a:lumOff val="40000"/>
-                </a:schemeClr>
-              </a:solidFill>
-            </a:endParaRPr>
-          </a:p>
-          <a:p>
-            <a:pPr marL="0" indent="0">
-              <a:buNone/>
-            </a:pPr>
-            <a:r>
-              <a:rPr lang="en-US" dirty="0" err="1">
-                <a:solidFill>
-                  <a:schemeClr val="accent6">
-                    <a:lumMod val="60000"/>
-                    <a:lumOff val="40000"/>
-                  </a:schemeClr>
-                </a:solidFill>
-              </a:rPr>
-              <a:t>Fdslj;f</a:t>
-            </a:r>
-            <a:endParaRPr lang="en-US" dirty="0">
-              <a:solidFill>
-                <a:schemeClr val="accent6">
-                  <a:lumMod val="60000"/>
-                  <a:lumOff val="40000"/>
-                </a:schemeClr>
-              </a:solidFill>
-            </a:endParaRPr>
-          </a:p>
-          <a:p>
-            <a:pPr marL="0" indent="0">
-              <a:buNone/>
-            </a:pPr>
-            <a:endParaRPr lang="en-US" dirty="0">
-              <a:solidFill>
-                <a:schemeClr val="accent6">
-                  <a:lumMod val="60000"/>
-                  <a:lumOff val="40000"/>
-                </a:schemeClr>
-              </a:solidFill>
-            </a:endParaRPr>
-          </a:p>
-          <a:p>
-            <a:pPr marL="0" indent="0">
-              <a:buNone/>
-            </a:pPr>
-            <a:r>
-              <a:rPr lang="en-US" dirty="0" err="1">
-                <a:solidFill>
-                  <a:schemeClr val="accent6">
-                    <a:lumMod val="60000"/>
-                    <a:lumOff val="40000"/>
-                  </a:schemeClr>
-                </a:solidFill>
-              </a:rPr>
-              <a:t>Fl;ds</a:t>
-            </a:r>
-            <a:endParaRPr lang="en-US" dirty="0">
-              <a:solidFill>
-                <a:schemeClr val="accent6">
-                  <a:lumMod val="60000"/>
-                  <a:lumOff val="40000"/>
-                </a:schemeClr>
-              </a:solidFill>
-            </a:endParaRPr>
-          </a:p>
-          <a:p>
-            <a:pPr marL="0" indent="0">
-              <a:buNone/>
-            </a:pPr>
-            <a:endParaRPr lang="en-US" dirty="0">
-              <a:solidFill>
-                <a:schemeClr val="accent6">
-                  <a:lumMod val="60000"/>
-                  <a:lumOff val="40000"/>
-                </a:schemeClr>
-              </a:solidFill>
-            </a:endParaRPr>
-          </a:p>
-        </p:txBody>
-      </p:sp>
     </p:spTree>
     <p:extLst>
       <p:ext uri="{BB962C8B-B14F-4D97-AF65-F5344CB8AC3E}">
@@ -8643,6 +8481,17 @@
               <a:buNone/>
             </a:pPr>
             <a:r>
+              <a:rPr lang="en-US" sz="2400" b="1">
+                <a:solidFill>
+                  <a:schemeClr val="accent6">
+                    <a:lumMod val="60000"/>
+                    <a:lumOff val="40000"/>
+                  </a:schemeClr>
+                </a:solidFill>
+              </a:rPr>
+              <a:t>Companies </a:t>
+            </a:r>
+            <a:r>
               <a:rPr lang="en-US" sz="2400" b="1" dirty="0">
                 <a:solidFill>
                   <a:schemeClr val="accent6">
@@ -8651,7 +8500,7 @@
                   </a:schemeClr>
                 </a:solidFill>
               </a:rPr>
-              <a:t>Real companies don’t just train models — </a:t>
+              <a:t>don’t just train models — </a:t>
             </a:r>
           </a:p>
           <a:p>
@@ -9254,6 +9103,144 @@
               <a:rPr lang="en-US" dirty="0"/>
               <a:t>Deploy best model</a:t>
             </a:r>
+          </a:p>
+        </p:txBody>
+      </p:sp>
+      <p:sp>
+        <p:nvSpPr>
+          <p:cNvPr id="6" name="Arrow: Right 5">
+            <a:extLst>
+              <a:ext uri="{FF2B5EF4-FFF2-40B4-BE49-F238E27FC236}">
+                <a16:creationId xmlns:a16="http://schemas.microsoft.com/office/drawing/2014/main" id="{BCF8E911-53A0-91F1-0EFF-44675469C9D5}"/>
+              </a:ext>
+            </a:extLst>
+          </p:cNvPr>
+          <p:cNvSpPr/>
+          <p:nvPr/>
+        </p:nvSpPr>
+        <p:spPr>
+          <a:xfrm>
+            <a:off x="2231136" y="4105656"/>
+            <a:ext cx="312932" cy="292608"/>
+          </a:xfrm>
+          <a:prstGeom prst="rightArrow">
+            <a:avLst/>
+          </a:prstGeom>
+        </p:spPr>
+        <p:style>
+          <a:lnRef idx="2">
+            <a:schemeClr val="accent1">
+              <a:shade val="15000"/>
+            </a:schemeClr>
+          </a:lnRef>
+          <a:fillRef idx="1">
+            <a:schemeClr val="accent1"/>
+          </a:fillRef>
+          <a:effectRef idx="0">
+            <a:schemeClr val="accent1"/>
+          </a:effectRef>
+          <a:fontRef idx="minor">
+            <a:schemeClr val="lt1"/>
+          </a:fontRef>
+        </p:style>
+        <p:txBody>
+          <a:bodyPr rtlCol="0" anchor="ctr"/>
+          <a:lstStyle/>
+          <a:p>
+            <a:pPr algn="ctr"/>
+            <a:endParaRPr lang="en-IN"/>
+          </a:p>
+        </p:txBody>
+      </p:sp>
+      <p:sp>
+        <p:nvSpPr>
+          <p:cNvPr id="8" name="Arrow: Right 7">
+            <a:extLst>
+              <a:ext uri="{FF2B5EF4-FFF2-40B4-BE49-F238E27FC236}">
+                <a16:creationId xmlns:a16="http://schemas.microsoft.com/office/drawing/2014/main" id="{D6D382F2-E1A9-1077-F0D1-A8CBC3688975}"/>
+              </a:ext>
+            </a:extLst>
+          </p:cNvPr>
+          <p:cNvSpPr/>
+          <p:nvPr/>
+        </p:nvSpPr>
+        <p:spPr>
+          <a:xfrm>
+            <a:off x="4939288" y="4111752"/>
+            <a:ext cx="312932" cy="292608"/>
+          </a:xfrm>
+          <a:prstGeom prst="rightArrow">
+            <a:avLst/>
+          </a:prstGeom>
+        </p:spPr>
+        <p:style>
+          <a:lnRef idx="2">
+            <a:schemeClr val="accent1">
+              <a:shade val="15000"/>
+            </a:schemeClr>
+          </a:lnRef>
+          <a:fillRef idx="1">
+            <a:schemeClr val="accent1"/>
+          </a:fillRef>
+          <a:effectRef idx="0">
+            <a:schemeClr val="accent1"/>
+          </a:effectRef>
+          <a:fontRef idx="minor">
+            <a:schemeClr val="lt1"/>
+          </a:fontRef>
+        </p:style>
+        <p:txBody>
+          <a:bodyPr rtlCol="0" anchor="ctr"/>
+          <a:lstStyle/>
+          <a:p>
+            <a:pPr algn="ctr"/>
+            <a:endParaRPr lang="en-IN"/>
+          </a:p>
+        </p:txBody>
+      </p:sp>
+      <p:sp>
+        <p:nvSpPr>
+          <p:cNvPr id="11" name="Arrow: Right 10">
+            <a:extLst>
+              <a:ext uri="{FF2B5EF4-FFF2-40B4-BE49-F238E27FC236}">
+                <a16:creationId xmlns:a16="http://schemas.microsoft.com/office/drawing/2014/main" id="{133581F5-701A-AE45-396A-AAF00FCE7395}"/>
+              </a:ext>
+            </a:extLst>
+          </p:cNvPr>
+          <p:cNvSpPr/>
+          <p:nvPr/>
+        </p:nvSpPr>
+        <p:spPr>
+          <a:xfrm>
+            <a:off x="7658094" y="4128520"/>
+            <a:ext cx="312932" cy="292608"/>
+          </a:xfrm>
+          <a:prstGeom prst="rightArrow">
+            <a:avLst/>
+          </a:prstGeom>
+        </p:spPr>
+        <p:style>
+          <a:lnRef idx="2">
+            <a:schemeClr val="accent1">
+              <a:shade val="15000"/>
+            </a:schemeClr>
+          </a:lnRef>
+          <a:fillRef idx="1">
+            <a:schemeClr val="accent1"/>
+          </a:fillRef>
+          <a:effectRef idx="0">
+            <a:schemeClr val="accent1"/>
+          </a:effectRef>
+          <a:fontRef idx="minor">
+            <a:schemeClr val="lt1"/>
+          </a:fontRef>
+        </p:style>
+        <p:txBody>
+          <a:bodyPr rtlCol="0" anchor="ctr"/>
+          <a:lstStyle/>
+          <a:p>
+            <a:pPr algn="ctr"/>
+            <a:endParaRPr lang="en-IN"/>
           </a:p>
         </p:txBody>
       </p:sp>
